--- a/docs/deck/VaultDraw-賣家合作簡報.pptx
+++ b/docs/deck/VaultDraw-賣家合作簡報.pptx
@@ -19,6 +19,7 @@
     <p:sldId id="267" r:id="rId18"/>
     <p:sldId id="268" r:id="rId19"/>
     <p:sldId id="269" r:id="rId20"/>
+    <p:sldId id="270" r:id="rId21"/>
   </p:sldIdLst>
   <p:sldSz cx="12191695" cy="6858000" type="screen4x3"/>
   <p:notesSz cx="6858000" cy="9144000"/>
@@ -7708,7 +7709,7 @@
                 <a:ea typeface="PingFang TC"/>
                 <a:cs typeface="PingFang TC"/>
               </a:rPr>
-              <a:t>下一步</a:t>
+              <a:t>客人從哪裡來</a:t>
             </a:r>
           </a:p>
         </p:txBody>
@@ -7752,7 +7753,7 @@
                 <a:ea typeface="PingFang TC"/>
                 <a:cs typeface="PingFang TC"/>
               </a:rPr>
-              <a:t>想先開一個池試試看？</a:t>
+              <a:t>你把庫存投進來，客人從哪裡來？</a:t>
             </a:r>
           </a:p>
         </p:txBody>
@@ -7796,7 +7797,7 @@
                 <a:ea typeface="PingFang TC"/>
                 <a:cs typeface="PingFang TC"/>
               </a:rPr>
-              <a:t>第一個池上限 100 籤 / 100,000 點，沒有費用、不用保證金、不用審核排隊。</a:t>
+              <a:t>「抽成 0%」講的是你的成本，這一頁講的是流量。它是一份計畫 —— 沒有預估人數、沒有轉換率，平台還沒營運，那些數字給不出來。</a:t>
             </a:r>
           </a:p>
         </p:txBody>
@@ -7927,6 +7928,1395 @@
                 <a:cs typeface="PingFang TC"/>
               </a:rPr>
               <a:t>14</a:t>
+            </a:r>
+          </a:p>
+        </p:txBody>
+      </p:sp>
+      <p:sp>
+        <p:nvSpPr>
+          <p:cNvPr id="9" name="Rounded Rectangle 8"/>
+          <p:cNvSpPr/>
+          <p:nvPr/>
+        </p:nvSpPr>
+        <p:spPr>
+          <a:xfrm>
+            <a:off x="713232" y="2468880"/>
+            <a:ext cx="10765231" cy="1115568"/>
+          </a:xfrm>
+          <a:prstGeom prst="roundRect">
+            <a:avLst>
+              <a:gd name="adj" fmla="val 3500"/>
+            </a:avLst>
+          </a:prstGeom>
+          <a:solidFill>
+            <a:srgbClr val="17161A"/>
+          </a:solidFill>
+          <a:ln w="12700">
+            <a:solidFill>
+              <a:srgbClr val="302D38"/>
+            </a:solidFill>
+          </a:ln>
+          <a:effectLst/>
+        </p:spPr>
+        <p:style>
+          <a:lnRef idx="1">
+            <a:schemeClr val="accent1"/>
+          </a:lnRef>
+          <a:fillRef idx="3">
+            <a:schemeClr val="accent1"/>
+          </a:fillRef>
+          <a:effectRef idx="2">
+            <a:schemeClr val="accent1"/>
+          </a:effectRef>
+          <a:fontRef idx="minor">
+            <a:schemeClr val="lt1"/>
+          </a:fontRef>
+        </p:style>
+        <p:txBody>
+          <a:bodyPr rtlCol="0" anchor="ctr"/>
+          <a:lstStyle/>
+          <a:p/>
+        </p:txBody>
+      </p:sp>
+      <p:sp>
+        <p:nvSpPr>
+          <p:cNvPr id="10" name="Rectangle 9"/>
+          <p:cNvSpPr/>
+          <p:nvPr/>
+        </p:nvSpPr>
+        <p:spPr>
+          <a:xfrm>
+            <a:off x="987552" y="2468880"/>
+            <a:ext cx="731520" cy="38100"/>
+          </a:xfrm>
+          <a:prstGeom prst="rect">
+            <a:avLst/>
+          </a:prstGeom>
+          <a:solidFill>
+            <a:srgbClr val="F0BB52"/>
+          </a:solidFill>
+          <a:ln>
+            <a:noFill/>
+          </a:ln>
+          <a:effectLst/>
+        </p:spPr>
+        <p:style>
+          <a:lnRef idx="1">
+            <a:schemeClr val="accent1"/>
+          </a:lnRef>
+          <a:fillRef idx="3">
+            <a:schemeClr val="accent1"/>
+          </a:fillRef>
+          <a:effectRef idx="2">
+            <a:schemeClr val="accent1"/>
+          </a:effectRef>
+          <a:fontRef idx="minor">
+            <a:schemeClr val="lt1"/>
+          </a:fontRef>
+        </p:style>
+        <p:txBody>
+          <a:bodyPr rtlCol="0" anchor="ctr"/>
+          <a:lstStyle/>
+          <a:p/>
+        </p:txBody>
+      </p:sp>
+      <p:sp>
+        <p:nvSpPr>
+          <p:cNvPr id="11" name="TextBox 10"/>
+          <p:cNvSpPr txBox="1"/>
+          <p:nvPr/>
+        </p:nvSpPr>
+        <p:spPr>
+          <a:xfrm>
+            <a:off x="1005840" y="2706624"/>
+            <a:ext cx="2377440" cy="292608"/>
+          </a:xfrm>
+          <a:prstGeom prst="rect">
+            <a:avLst/>
+          </a:prstGeom>
+          <a:noFill/>
+        </p:spPr>
+        <p:txBody>
+          <a:bodyPr wrap="square" anchor="t" lIns="0" rIns="0" tIns="0" bIns="0">
+            <a:spAutoFit/>
+          </a:bodyPr>
+          <a:lstStyle/>
+          <a:p>
+            <a:pPr algn="l">
+              <a:lnSpc>
+                <a:spcPct val="135000"/>
+              </a:lnSpc>
+              <a:spcAft>
+                <a:spcPts val="0"/>
+              </a:spcAft>
+            </a:pPr>
+            <a:r>
+              <a:rPr sz="1600" b="1">
+                <a:solidFill>
+                  <a:srgbClr val="F4F1EE"/>
+                </a:solidFill>
+                <a:latin typeface="PingFang TC"/>
+                <a:ea typeface="PingFang TC"/>
+                <a:cs typeface="PingFang TC"/>
+              </a:rPr>
+              <a:t>社群</a:t>
+            </a:r>
+          </a:p>
+        </p:txBody>
+      </p:sp>
+      <p:sp>
+        <p:nvSpPr>
+          <p:cNvPr id="12" name="TextBox 11"/>
+          <p:cNvSpPr txBox="1"/>
+          <p:nvPr/>
+        </p:nvSpPr>
+        <p:spPr>
+          <a:xfrm>
+            <a:off x="1005840" y="3072384"/>
+            <a:ext cx="2377440" cy="237744"/>
+          </a:xfrm>
+          <a:prstGeom prst="rect">
+            <a:avLst/>
+          </a:prstGeom>
+          <a:noFill/>
+        </p:spPr>
+        <p:txBody>
+          <a:bodyPr wrap="square" anchor="t" lIns="0" rIns="0" tIns="0" bIns="0">
+            <a:spAutoFit/>
+          </a:bodyPr>
+          <a:lstStyle/>
+          <a:p>
+            <a:pPr algn="l">
+              <a:lnSpc>
+                <a:spcPct val="135000"/>
+              </a:lnSpc>
+              <a:spcAft>
+                <a:spcPts val="0"/>
+              </a:spcAft>
+            </a:pPr>
+            <a:r>
+              <a:rPr sz="1150" b="1">
+                <a:solidFill>
+                  <a:srgbClr val="F0BB52"/>
+                </a:solidFill>
+                <a:latin typeface="PingFang TC"/>
+                <a:ea typeface="PingFang TC"/>
+                <a:cs typeface="PingFang TC"/>
+              </a:rPr>
+              <a:t>靠內容與口碑，不靠買廣告</a:t>
+            </a:r>
+          </a:p>
+        </p:txBody>
+      </p:sp>
+      <p:sp>
+        <p:nvSpPr>
+          <p:cNvPr id="13" name="TextBox 12"/>
+          <p:cNvSpPr txBox="1"/>
+          <p:nvPr/>
+        </p:nvSpPr>
+        <p:spPr>
+          <a:xfrm>
+            <a:off x="3547872" y="2670048"/>
+            <a:ext cx="7619695" cy="274320"/>
+          </a:xfrm>
+          <a:prstGeom prst="rect">
+            <a:avLst/>
+          </a:prstGeom>
+          <a:noFill/>
+        </p:spPr>
+        <p:txBody>
+          <a:bodyPr wrap="square" anchor="t" lIns="0" rIns="0" tIns="0" bIns="0">
+            <a:spAutoFit/>
+          </a:bodyPr>
+          <a:lstStyle/>
+          <a:p>
+            <a:pPr algn="l">
+              <a:lnSpc>
+                <a:spcPct val="135000"/>
+              </a:lnSpc>
+              <a:spcAft>
+                <a:spcPts val="0"/>
+              </a:spcAft>
+            </a:pPr>
+            <a:r>
+              <a:rPr sz="1150" b="1">
+                <a:solidFill>
+                  <a:srgbClr val="F4F1EE"/>
+                </a:solidFill>
+                <a:latin typeface="PingFang TC"/>
+                <a:ea typeface="PingFang TC"/>
+                <a:cs typeface="PingFang TC"/>
+              </a:rPr>
+              <a:t>付費廣告投不了 —— </a:t>
+            </a:r>
+            <a:r>
+              <a:rPr sz="1150" b="0">
+                <a:solidFill>
+                  <a:srgbClr val="A49B96"/>
+                </a:solidFill>
+                <a:latin typeface="PingFang TC"/>
+                <a:ea typeface="PingFang TC"/>
+                <a:cs typeface="PingFang TC"/>
+              </a:rPr>
+              <a:t>Meta 把台灣列在博弈類廣告的不支援市場，Google 台灣只開放國營彩券。</a:t>
+            </a:r>
+          </a:p>
+        </p:txBody>
+      </p:sp>
+      <p:sp>
+        <p:nvSpPr>
+          <p:cNvPr id="14" name="TextBox 13"/>
+          <p:cNvSpPr txBox="1"/>
+          <p:nvPr/>
+        </p:nvSpPr>
+        <p:spPr>
+          <a:xfrm>
+            <a:off x="3547872" y="2962656"/>
+            <a:ext cx="7619695" cy="274320"/>
+          </a:xfrm>
+          <a:prstGeom prst="rect">
+            <a:avLst/>
+          </a:prstGeom>
+          <a:noFill/>
+        </p:spPr>
+        <p:txBody>
+          <a:bodyPr wrap="square" anchor="t" lIns="0" rIns="0" tIns="0" bIns="0">
+            <a:spAutoFit/>
+          </a:bodyPr>
+          <a:lstStyle/>
+          <a:p>
+            <a:pPr algn="l">
+              <a:lnSpc>
+                <a:spcPct val="135000"/>
+              </a:lnSpc>
+              <a:spcAft>
+                <a:spcPts val="0"/>
+              </a:spcAft>
+            </a:pPr>
+            <a:r>
+              <a:rPr sz="1150" b="1">
+                <a:solidFill>
+                  <a:srgbClr val="F4F1EE"/>
+                </a:solidFill>
+                <a:latin typeface="PingFang TC"/>
+                <a:ea typeface="PingFang TC"/>
+                <a:cs typeface="PingFang TC"/>
+              </a:rPr>
+              <a:t>我們發的內容是驗算 —— </a:t>
+            </a:r>
+            <a:r>
+              <a:rPr sz="1150" b="0">
+                <a:solidFill>
+                  <a:srgbClr val="A49B96"/>
+                </a:solidFill>
+                <a:latin typeface="PingFang TC"/>
+                <a:ea typeface="PingFang TC"/>
+                <a:cs typeface="PingFang TC"/>
+              </a:rPr>
+              <a:t>完抽後公開種子，「自己算一次」比「開到大獎」的截圖耐看。</a:t>
+            </a:r>
+          </a:p>
+        </p:txBody>
+      </p:sp>
+      <p:sp>
+        <p:nvSpPr>
+          <p:cNvPr id="15" name="TextBox 14"/>
+          <p:cNvSpPr txBox="1"/>
+          <p:nvPr/>
+        </p:nvSpPr>
+        <p:spPr>
+          <a:xfrm>
+            <a:off x="3547872" y="3255264"/>
+            <a:ext cx="7619695" cy="274320"/>
+          </a:xfrm>
+          <a:prstGeom prst="rect">
+            <a:avLst/>
+          </a:prstGeom>
+          <a:noFill/>
+        </p:spPr>
+        <p:txBody>
+          <a:bodyPr wrap="square" anchor="t" lIns="0" rIns="0" tIns="0" bIns="0">
+            <a:spAutoFit/>
+          </a:bodyPr>
+          <a:lstStyle/>
+          <a:p>
+            <a:pPr algn="l">
+              <a:lnSpc>
+                <a:spcPct val="135000"/>
+              </a:lnSpc>
+              <a:spcAft>
+                <a:spcPts val="0"/>
+              </a:spcAft>
+            </a:pPr>
+            <a:r>
+              <a:rPr sz="1150" b="1">
+                <a:solidFill>
+                  <a:srgbClr val="F4F1EE"/>
+                </a:solidFill>
+                <a:latin typeface="PingFang TC"/>
+                <a:ea typeface="PingFang TC"/>
+                <a:cs typeface="PingFang TC"/>
+              </a:rPr>
+              <a:t>開箱合作一律標示業配 —— </a:t>
+            </a:r>
+            <a:r>
+              <a:rPr sz="1150" b="0">
+                <a:solidFill>
+                  <a:srgbClr val="A49B96"/>
+                </a:solidFill>
+                <a:latin typeface="PingFang TC"/>
+                <a:ea typeface="PingFang TC"/>
+                <a:cs typeface="PingFang TC"/>
+              </a:rPr>
+              <a:t>沒揭露的推薦在台灣是公平交易法的射程。要嘛標清楚，要嘛不做。</a:t>
+            </a:r>
+          </a:p>
+        </p:txBody>
+      </p:sp>
+      <p:sp>
+        <p:nvSpPr>
+          <p:cNvPr id="16" name="Rounded Rectangle 15"/>
+          <p:cNvSpPr/>
+          <p:nvPr/>
+        </p:nvSpPr>
+        <p:spPr>
+          <a:xfrm>
+            <a:off x="713232" y="3694176"/>
+            <a:ext cx="10765231" cy="1115568"/>
+          </a:xfrm>
+          <a:prstGeom prst="roundRect">
+            <a:avLst>
+              <a:gd name="adj" fmla="val 3500"/>
+            </a:avLst>
+          </a:prstGeom>
+          <a:solidFill>
+            <a:srgbClr val="17161A"/>
+          </a:solidFill>
+          <a:ln w="12700">
+            <a:solidFill>
+              <a:srgbClr val="302D38"/>
+            </a:solidFill>
+          </a:ln>
+          <a:effectLst/>
+        </p:spPr>
+        <p:style>
+          <a:lnRef idx="1">
+            <a:schemeClr val="accent1"/>
+          </a:lnRef>
+          <a:fillRef idx="3">
+            <a:schemeClr val="accent1"/>
+          </a:fillRef>
+          <a:effectRef idx="2">
+            <a:schemeClr val="accent1"/>
+          </a:effectRef>
+          <a:fontRef idx="minor">
+            <a:schemeClr val="lt1"/>
+          </a:fontRef>
+        </p:style>
+        <p:txBody>
+          <a:bodyPr rtlCol="0" anchor="ctr"/>
+          <a:lstStyle/>
+          <a:p/>
+        </p:txBody>
+      </p:sp>
+      <p:sp>
+        <p:nvSpPr>
+          <p:cNvPr id="17" name="Rectangle 16"/>
+          <p:cNvSpPr/>
+          <p:nvPr/>
+        </p:nvSpPr>
+        <p:spPr>
+          <a:xfrm>
+            <a:off x="987552" y="3694176"/>
+            <a:ext cx="731520" cy="38100"/>
+          </a:xfrm>
+          <a:prstGeom prst="rect">
+            <a:avLst/>
+          </a:prstGeom>
+          <a:solidFill>
+            <a:srgbClr val="A98CFF"/>
+          </a:solidFill>
+          <a:ln>
+            <a:noFill/>
+          </a:ln>
+          <a:effectLst/>
+        </p:spPr>
+        <p:style>
+          <a:lnRef idx="1">
+            <a:schemeClr val="accent1"/>
+          </a:lnRef>
+          <a:fillRef idx="3">
+            <a:schemeClr val="accent1"/>
+          </a:fillRef>
+          <a:effectRef idx="2">
+            <a:schemeClr val="accent1"/>
+          </a:effectRef>
+          <a:fontRef idx="minor">
+            <a:schemeClr val="lt1"/>
+          </a:fontRef>
+        </p:style>
+        <p:txBody>
+          <a:bodyPr rtlCol="0" anchor="ctr"/>
+          <a:lstStyle/>
+          <a:p/>
+        </p:txBody>
+      </p:sp>
+      <p:sp>
+        <p:nvSpPr>
+          <p:cNvPr id="18" name="TextBox 17"/>
+          <p:cNvSpPr txBox="1"/>
+          <p:nvPr/>
+        </p:nvSpPr>
+        <p:spPr>
+          <a:xfrm>
+            <a:off x="1005840" y="3931920"/>
+            <a:ext cx="2377440" cy="292608"/>
+          </a:xfrm>
+          <a:prstGeom prst="rect">
+            <a:avLst/>
+          </a:prstGeom>
+          <a:noFill/>
+        </p:spPr>
+        <p:txBody>
+          <a:bodyPr wrap="square" anchor="t" lIns="0" rIns="0" tIns="0" bIns="0">
+            <a:spAutoFit/>
+          </a:bodyPr>
+          <a:lstStyle/>
+          <a:p>
+            <a:pPr algn="l">
+              <a:lnSpc>
+                <a:spcPct val="135000"/>
+              </a:lnSpc>
+              <a:spcAft>
+                <a:spcPts val="0"/>
+              </a:spcAft>
+            </a:pPr>
+            <a:r>
+              <a:rPr sz="1600" b="1">
+                <a:solidFill>
+                  <a:srgbClr val="F4F1EE"/>
+                </a:solidFill>
+                <a:latin typeface="PingFang TC"/>
+                <a:ea typeface="PingFang TC"/>
+                <a:cs typeface="PingFang TC"/>
+              </a:rPr>
+              <a:t>活動</a:t>
+            </a:r>
+          </a:p>
+        </p:txBody>
+      </p:sp>
+      <p:sp>
+        <p:nvSpPr>
+          <p:cNvPr id="19" name="TextBox 18"/>
+          <p:cNvSpPr txBox="1"/>
+          <p:nvPr/>
+        </p:nvSpPr>
+        <p:spPr>
+          <a:xfrm>
+            <a:off x="1005840" y="4297680"/>
+            <a:ext cx="2377440" cy="237744"/>
+          </a:xfrm>
+          <a:prstGeom prst="rect">
+            <a:avLst/>
+          </a:prstGeom>
+          <a:noFill/>
+        </p:spPr>
+        <p:txBody>
+          <a:bodyPr wrap="square" anchor="t" lIns="0" rIns="0" tIns="0" bIns="0">
+            <a:spAutoFit/>
+          </a:bodyPr>
+          <a:lstStyle/>
+          <a:p>
+            <a:pPr algn="l">
+              <a:lnSpc>
+                <a:spcPct val="135000"/>
+              </a:lnSpc>
+              <a:spcAft>
+                <a:spcPts val="0"/>
+              </a:spcAft>
+            </a:pPr>
+            <a:r>
+              <a:rPr sz="1150" b="1">
+                <a:solidFill>
+                  <a:srgbClr val="A98CFF"/>
+                </a:solidFill>
+                <a:latin typeface="PingFang TC"/>
+                <a:ea typeface="PingFang TC"/>
+                <a:cs typeface="PingFang TC"/>
+              </a:rPr>
+              <a:t>平台出版位與規則，不出現金</a:t>
+            </a:r>
+          </a:p>
+        </p:txBody>
+      </p:sp>
+      <p:sp>
+        <p:nvSpPr>
+          <p:cNvPr id="20" name="TextBox 19"/>
+          <p:cNvSpPr txBox="1"/>
+          <p:nvPr/>
+        </p:nvSpPr>
+        <p:spPr>
+          <a:xfrm>
+            <a:off x="3547872" y="3895344"/>
+            <a:ext cx="7619695" cy="274320"/>
+          </a:xfrm>
+          <a:prstGeom prst="rect">
+            <a:avLst/>
+          </a:prstGeom>
+          <a:noFill/>
+        </p:spPr>
+        <p:txBody>
+          <a:bodyPr wrap="square" anchor="t" lIns="0" rIns="0" tIns="0" bIns="0">
+            <a:spAutoFit/>
+          </a:bodyPr>
+          <a:lstStyle/>
+          <a:p>
+            <a:pPr algn="l">
+              <a:lnSpc>
+                <a:spcPct val="135000"/>
+              </a:lnSpc>
+              <a:spcAft>
+                <a:spcPts val="0"/>
+              </a:spcAft>
+            </a:pPr>
+            <a:r>
+              <a:rPr sz="1150" b="1">
+                <a:solidFill>
+                  <a:srgbClr val="F4F1EE"/>
+                </a:solidFill>
+                <a:latin typeface="PingFang TC"/>
+                <a:ea typeface="PingFang TC"/>
+                <a:cs typeface="PingFang TC"/>
+              </a:rPr>
+              <a:t>首發池排程 —— </a:t>
+            </a:r>
+            <a:r>
+              <a:rPr sz="1150" b="0">
+                <a:solidFill>
+                  <a:srgbClr val="A49B96"/>
+                </a:solidFill>
+                <a:latin typeface="PingFang TC"/>
+                <a:ea typeface="PingFang TC"/>
+                <a:cs typeface="PingFang TC"/>
+              </a:rPr>
+              <a:t>新賣家的第一個池排進大廳的固定版位，不必一開始就跟老池搶自然排序。</a:t>
+            </a:r>
+          </a:p>
+        </p:txBody>
+      </p:sp>
+      <p:sp>
+        <p:nvSpPr>
+          <p:cNvPr id="21" name="TextBox 20"/>
+          <p:cNvSpPr txBox="1"/>
+          <p:nvPr/>
+        </p:nvSpPr>
+        <p:spPr>
+          <a:xfrm>
+            <a:off x="3547872" y="4187952"/>
+            <a:ext cx="7619695" cy="274320"/>
+          </a:xfrm>
+          <a:prstGeom prst="rect">
+            <a:avLst/>
+          </a:prstGeom>
+          <a:noFill/>
+        </p:spPr>
+        <p:txBody>
+          <a:bodyPr wrap="square" anchor="t" lIns="0" rIns="0" tIns="0" bIns="0">
+            <a:spAutoFit/>
+          </a:bodyPr>
+          <a:lstStyle/>
+          <a:p>
+            <a:pPr algn="l">
+              <a:lnSpc>
+                <a:spcPct val="135000"/>
+              </a:lnSpc>
+              <a:spcAft>
+                <a:spcPts val="0"/>
+              </a:spcAft>
+            </a:pPr>
+            <a:r>
+              <a:rPr sz="1150" b="1">
+                <a:solidFill>
+                  <a:srgbClr val="F4F1EE"/>
+                </a:solidFill>
+                <a:latin typeface="PingFang TC"/>
+                <a:ea typeface="PingFang TC"/>
+                <a:cs typeface="PingFang TC"/>
+              </a:rPr>
+              <a:t>主題檔期 —— </a:t>
+            </a:r>
+            <a:r>
+              <a:rPr sz="1150" b="0">
+                <a:solidFill>
+                  <a:srgbClr val="A49B96"/>
+                </a:solidFill>
+                <a:latin typeface="PingFang TC"/>
+                <a:ea typeface="PingFang TC"/>
+                <a:cs typeface="PingFang TC"/>
+              </a:rPr>
+              <a:t>同一個系列或主題的池集中在同一週開，多個賣家共用一次流量。參不參加你決定。</a:t>
+            </a:r>
+          </a:p>
+        </p:txBody>
+      </p:sp>
+      <p:sp>
+        <p:nvSpPr>
+          <p:cNvPr id="22" name="TextBox 21"/>
+          <p:cNvSpPr txBox="1"/>
+          <p:nvPr/>
+        </p:nvSpPr>
+        <p:spPr>
+          <a:xfrm>
+            <a:off x="3547872" y="4480560"/>
+            <a:ext cx="7619695" cy="274320"/>
+          </a:xfrm>
+          <a:prstGeom prst="rect">
+            <a:avLst/>
+          </a:prstGeom>
+          <a:noFill/>
+        </p:spPr>
+        <p:txBody>
+          <a:bodyPr wrap="square" anchor="t" lIns="0" rIns="0" tIns="0" bIns="0">
+            <a:spAutoFit/>
+          </a:bodyPr>
+          <a:lstStyle/>
+          <a:p>
+            <a:pPr algn="l">
+              <a:lnSpc>
+                <a:spcPct val="135000"/>
+              </a:lnSpc>
+              <a:spcAft>
+                <a:spcPts val="0"/>
+              </a:spcAft>
+            </a:pPr>
+            <a:r>
+              <a:rPr sz="1150" b="1">
+                <a:solidFill>
+                  <a:srgbClr val="F4F1EE"/>
+                </a:solidFill>
+                <a:latin typeface="PingFang TC"/>
+                <a:ea typeface="PingFang TC"/>
+                <a:cs typeface="PingFang TC"/>
+              </a:rPr>
+              <a:t>不會辦的 —— </a:t>
+            </a:r>
+            <a:r>
+              <a:rPr sz="1150" b="0">
+                <a:solidFill>
+                  <a:srgbClr val="A49B96"/>
+                </a:solidFill>
+                <a:latin typeface="PingFang TC"/>
+                <a:ea typeface="PingFang TC"/>
+                <a:cs typeface="PingFang TC"/>
+              </a:rPr>
+              <a:t>抽中送現金、保證回本、平台加碼收購。點數不能提現、平台不能買回自己的獎品。</a:t>
+            </a:r>
+          </a:p>
+        </p:txBody>
+      </p:sp>
+      <p:sp>
+        <p:nvSpPr>
+          <p:cNvPr id="23" name="Rounded Rectangle 22"/>
+          <p:cNvSpPr/>
+          <p:nvPr/>
+        </p:nvSpPr>
+        <p:spPr>
+          <a:xfrm>
+            <a:off x="713232" y="4919472"/>
+            <a:ext cx="10765231" cy="1115568"/>
+          </a:xfrm>
+          <a:prstGeom prst="roundRect">
+            <a:avLst>
+              <a:gd name="adj" fmla="val 3500"/>
+            </a:avLst>
+          </a:prstGeom>
+          <a:solidFill>
+            <a:srgbClr val="17161A"/>
+          </a:solidFill>
+          <a:ln w="12700">
+            <a:solidFill>
+              <a:srgbClr val="302D38"/>
+            </a:solidFill>
+          </a:ln>
+          <a:effectLst/>
+        </p:spPr>
+        <p:style>
+          <a:lnRef idx="1">
+            <a:schemeClr val="accent1"/>
+          </a:lnRef>
+          <a:fillRef idx="3">
+            <a:schemeClr val="accent1"/>
+          </a:fillRef>
+          <a:effectRef idx="2">
+            <a:schemeClr val="accent1"/>
+          </a:effectRef>
+          <a:fontRef idx="minor">
+            <a:schemeClr val="lt1"/>
+          </a:fontRef>
+        </p:style>
+        <p:txBody>
+          <a:bodyPr rtlCol="0" anchor="ctr"/>
+          <a:lstStyle/>
+          <a:p/>
+        </p:txBody>
+      </p:sp>
+      <p:sp>
+        <p:nvSpPr>
+          <p:cNvPr id="24" name="Rectangle 23"/>
+          <p:cNvSpPr/>
+          <p:nvPr/>
+        </p:nvSpPr>
+        <p:spPr>
+          <a:xfrm>
+            <a:off x="987552" y="4919472"/>
+            <a:ext cx="731520" cy="38100"/>
+          </a:xfrm>
+          <a:prstGeom prst="rect">
+            <a:avLst/>
+          </a:prstGeom>
+          <a:solidFill>
+            <a:srgbClr val="35C98A"/>
+          </a:solidFill>
+          <a:ln>
+            <a:noFill/>
+          </a:ln>
+          <a:effectLst/>
+        </p:spPr>
+        <p:style>
+          <a:lnRef idx="1">
+            <a:schemeClr val="accent1"/>
+          </a:lnRef>
+          <a:fillRef idx="3">
+            <a:schemeClr val="accent1"/>
+          </a:fillRef>
+          <a:effectRef idx="2">
+            <a:schemeClr val="accent1"/>
+          </a:effectRef>
+          <a:fontRef idx="minor">
+            <a:schemeClr val="lt1"/>
+          </a:fontRef>
+        </p:style>
+        <p:txBody>
+          <a:bodyPr rtlCol="0" anchor="ctr"/>
+          <a:lstStyle/>
+          <a:p/>
+        </p:txBody>
+      </p:sp>
+      <p:sp>
+        <p:nvSpPr>
+          <p:cNvPr id="25" name="TextBox 24"/>
+          <p:cNvSpPr txBox="1"/>
+          <p:nvPr/>
+        </p:nvSpPr>
+        <p:spPr>
+          <a:xfrm>
+            <a:off x="1005840" y="5157216"/>
+            <a:ext cx="2377440" cy="292608"/>
+          </a:xfrm>
+          <a:prstGeom prst="rect">
+            <a:avLst/>
+          </a:prstGeom>
+          <a:noFill/>
+        </p:spPr>
+        <p:txBody>
+          <a:bodyPr wrap="square" anchor="t" lIns="0" rIns="0" tIns="0" bIns="0">
+            <a:spAutoFit/>
+          </a:bodyPr>
+          <a:lstStyle/>
+          <a:p>
+            <a:pPr algn="l">
+              <a:lnSpc>
+                <a:spcPct val="135000"/>
+              </a:lnSpc>
+              <a:spcAft>
+                <a:spcPts val="0"/>
+              </a:spcAft>
+            </a:pPr>
+            <a:r>
+              <a:rPr sz="1600" b="1">
+                <a:solidFill>
+                  <a:srgbClr val="F4F1EE"/>
+                </a:solidFill>
+                <a:latin typeface="PingFang TC"/>
+                <a:ea typeface="PingFang TC"/>
+                <a:cs typeface="PingFang TC"/>
+              </a:rPr>
+              <a:t>跟店家合作</a:t>
+            </a:r>
+          </a:p>
+        </p:txBody>
+      </p:sp>
+      <p:sp>
+        <p:nvSpPr>
+          <p:cNvPr id="26" name="TextBox 25"/>
+          <p:cNvSpPr txBox="1"/>
+          <p:nvPr/>
+        </p:nvSpPr>
+        <p:spPr>
+          <a:xfrm>
+            <a:off x="1005840" y="5522976"/>
+            <a:ext cx="2377440" cy="237744"/>
+          </a:xfrm>
+          <a:prstGeom prst="rect">
+            <a:avLst/>
+          </a:prstGeom>
+          <a:noFill/>
+        </p:spPr>
+        <p:txBody>
+          <a:bodyPr wrap="square" anchor="t" lIns="0" rIns="0" tIns="0" bIns="0">
+            <a:spAutoFit/>
+          </a:bodyPr>
+          <a:lstStyle/>
+          <a:p>
+            <a:pPr algn="l">
+              <a:lnSpc>
+                <a:spcPct val="135000"/>
+              </a:lnSpc>
+              <a:spcAft>
+                <a:spcPts val="0"/>
+              </a:spcAft>
+            </a:pPr>
+            <a:r>
+              <a:rPr sz="1150" b="1">
+                <a:solidFill>
+                  <a:srgbClr val="35C98A"/>
+                </a:solidFill>
+                <a:latin typeface="PingFang TC"/>
+                <a:ea typeface="PingFang TC"/>
+                <a:cs typeface="PingFang TC"/>
+              </a:rPr>
+              <a:t>你的店與你的池互相帶客</a:t>
+            </a:r>
+          </a:p>
+        </p:txBody>
+      </p:sp>
+      <p:sp>
+        <p:nvSpPr>
+          <p:cNvPr id="27" name="TextBox 26"/>
+          <p:cNvSpPr txBox="1"/>
+          <p:nvPr/>
+        </p:nvSpPr>
+        <p:spPr>
+          <a:xfrm>
+            <a:off x="3547872" y="5120640"/>
+            <a:ext cx="7619695" cy="274320"/>
+          </a:xfrm>
+          <a:prstGeom prst="rect">
+            <a:avLst/>
+          </a:prstGeom>
+          <a:noFill/>
+        </p:spPr>
+        <p:txBody>
+          <a:bodyPr wrap="square" anchor="t" lIns="0" rIns="0" tIns="0" bIns="0">
+            <a:spAutoFit/>
+          </a:bodyPr>
+          <a:lstStyle/>
+          <a:p>
+            <a:pPr algn="l">
+              <a:lnSpc>
+                <a:spcPct val="135000"/>
+              </a:lnSpc>
+              <a:spcAft>
+                <a:spcPts val="0"/>
+              </a:spcAft>
+            </a:pPr>
+            <a:r>
+              <a:rPr sz="1150" b="1">
+                <a:solidFill>
+                  <a:srgbClr val="F4F1EE"/>
+                </a:solidFill>
+                <a:latin typeface="PingFang TC"/>
+                <a:ea typeface="PingFang TC"/>
+                <a:cs typeface="PingFang TC"/>
+              </a:rPr>
+              <a:t>賣家頁是你的線上門面 —— </a:t>
+            </a:r>
+            <a:r>
+              <a:rPr sz="1150" b="0">
+                <a:solidFill>
+                  <a:srgbClr val="A49B96"/>
+                </a:solidFill>
+                <a:latin typeface="PingFang TC"/>
+                <a:ea typeface="PingFang TC"/>
+                <a:cs typeface="PingFang TC"/>
+              </a:rPr>
+              <a:t>開過的池、已出貨卡片、平均出貨天數、糾紛率，跟你的簡介同一頁。</a:t>
+            </a:r>
+          </a:p>
+        </p:txBody>
+      </p:sp>
+      <p:sp>
+        <p:nvSpPr>
+          <p:cNvPr id="28" name="TextBox 27"/>
+          <p:cNvSpPr txBox="1"/>
+          <p:nvPr/>
+        </p:nvSpPr>
+        <p:spPr>
+          <a:xfrm>
+            <a:off x="3547872" y="5413248"/>
+            <a:ext cx="7619695" cy="274320"/>
+          </a:xfrm>
+          <a:prstGeom prst="rect">
+            <a:avLst/>
+          </a:prstGeom>
+          <a:noFill/>
+        </p:spPr>
+        <p:txBody>
+          <a:bodyPr wrap="square" anchor="t" lIns="0" rIns="0" tIns="0" bIns="0">
+            <a:spAutoFit/>
+          </a:bodyPr>
+          <a:lstStyle/>
+          <a:p>
+            <a:pPr algn="l">
+              <a:lnSpc>
+                <a:spcPct val="135000"/>
+              </a:lnSpc>
+              <a:spcAft>
+                <a:spcPts val="0"/>
+              </a:spcAft>
+            </a:pPr>
+            <a:r>
+              <a:rPr sz="1150" b="1">
+                <a:solidFill>
+                  <a:srgbClr val="F4F1EE"/>
+                </a:solidFill>
+                <a:latin typeface="PingFang TC"/>
+                <a:ea typeface="PingFang TC"/>
+                <a:cs typeface="PingFang TC"/>
+              </a:rPr>
+              <a:t>池有公開網址 —— </a:t>
+            </a:r>
+            <a:r>
+              <a:rPr sz="1150" b="0">
+                <a:solidFill>
+                  <a:srgbClr val="A49B96"/>
+                </a:solidFill>
+                <a:latin typeface="PingFang TC"/>
+                <a:ea typeface="PingFang TC"/>
+                <a:cs typeface="PingFang TC"/>
+              </a:rPr>
+              <a:t>印成 QR 貼在櫃檯、發進你自己的 LINE 群與社團。店裡看到卡，回家抽你的池。</a:t>
+            </a:r>
+          </a:p>
+        </p:txBody>
+      </p:sp>
+      <p:sp>
+        <p:nvSpPr>
+          <p:cNvPr id="29" name="TextBox 28"/>
+          <p:cNvSpPr txBox="1"/>
+          <p:nvPr/>
+        </p:nvSpPr>
+        <p:spPr>
+          <a:xfrm>
+            <a:off x="3547872" y="5705856"/>
+            <a:ext cx="7619695" cy="274320"/>
+          </a:xfrm>
+          <a:prstGeom prst="rect">
+            <a:avLst/>
+          </a:prstGeom>
+          <a:noFill/>
+        </p:spPr>
+        <p:txBody>
+          <a:bodyPr wrap="square" anchor="t" lIns="0" rIns="0" tIns="0" bIns="0">
+            <a:spAutoFit/>
+          </a:bodyPr>
+          <a:lstStyle/>
+          <a:p>
+            <a:pPr algn="l">
+              <a:lnSpc>
+                <a:spcPct val="135000"/>
+              </a:lnSpc>
+              <a:spcAft>
+                <a:spcPts val="0"/>
+              </a:spcAft>
+            </a:pPr>
+            <a:r>
+              <a:rPr sz="1150" b="1">
+                <a:solidFill>
+                  <a:srgbClr val="F4F1EE"/>
+                </a:solidFill>
+                <a:latin typeface="PingFang TC"/>
+                <a:ea typeface="PingFang TC"/>
+                <a:cs typeface="PingFang TC"/>
+              </a:rPr>
+              <a:t>做不到的 —— </a:t>
+            </a:r>
+            <a:r>
+              <a:rPr sz="1150" b="0">
+                <a:solidFill>
+                  <a:srgbClr val="A49B96"/>
+                </a:solidFill>
+                <a:latin typeface="PingFang TC"/>
+                <a:ea typeface="PingFang TC"/>
+                <a:cs typeface="PingFang TC"/>
+              </a:rPr>
+              <a:t>平台不代管卡，寄賣沒有；一個池只屬於一個賣家，聯名池目前也沒有。</a:t>
+            </a:r>
+          </a:p>
+        </p:txBody>
+      </p:sp>
+      <p:sp>
+        <p:nvSpPr>
+          <p:cNvPr id="30" name="TextBox 29"/>
+          <p:cNvSpPr txBox="1"/>
+          <p:nvPr/>
+        </p:nvSpPr>
+        <p:spPr>
+          <a:xfrm>
+            <a:off x="713232" y="6089904"/>
+            <a:ext cx="10765231" cy="219456"/>
+          </a:xfrm>
+          <a:prstGeom prst="rect">
+            <a:avLst/>
+          </a:prstGeom>
+          <a:noFill/>
+        </p:spPr>
+        <p:txBody>
+          <a:bodyPr wrap="square" anchor="t" lIns="0" rIns="0" tIns="0" bIns="0">
+            <a:spAutoFit/>
+          </a:bodyPr>
+          <a:lstStyle/>
+          <a:p>
+            <a:pPr algn="l">
+              <a:lnSpc>
+                <a:spcPct val="135000"/>
+              </a:lnSpc>
+              <a:spcAft>
+                <a:spcPts val="0"/>
+              </a:spcAft>
+            </a:pPr>
+            <a:r>
+              <a:rPr sz="1000" b="0">
+                <a:solidFill>
+                  <a:srgbClr val="6F6862"/>
+                </a:solidFill>
+                <a:latin typeface="PingFang TC"/>
+                <a:ea typeface="PingFang TC"/>
+                <a:cs typeface="PingFang TC"/>
+              </a:rPr>
+              <a:t>廣告政策查證（政策原文）：Meta「Online Gambling and Games」的不支援市場清單列有台灣；Google Ads 台灣 gambling 僅開放國營／國家主辦彩券，且經營者須為國家核准實體。</a:t>
+            </a:r>
+          </a:p>
+        </p:txBody>
+      </p:sp>
+    </p:spTree>
+  </p:cSld>
+  <p:clrMapOvr>
+    <a:masterClrMapping/>
+  </p:clrMapOvr>
+</p:sld>
+</file>
+
+<file path=ppt/slides/slide15.xml><?xml version="1.0" encoding="utf-8"?>
+<p:sld xmlns:a="http://schemas.openxmlformats.org/drawingml/2006/main" xmlns:p="http://schemas.openxmlformats.org/presentationml/2006/main" xmlns:r="http://schemas.openxmlformats.org/officeDocument/2006/relationships">
+  <p:cSld>
+    <p:spTree>
+      <p:nvGrpSpPr>
+        <p:cNvPr id="1" name=""/>
+        <p:cNvGrpSpPr/>
+        <p:nvPr/>
+      </p:nvGrpSpPr>
+      <p:grpSpPr/>
+      <p:sp>
+        <p:nvSpPr>
+          <p:cNvPr id="2" name="Rectangle 1"/>
+          <p:cNvSpPr/>
+          <p:nvPr/>
+        </p:nvSpPr>
+        <p:spPr>
+          <a:xfrm>
+            <a:off x="0" y="0"/>
+            <a:ext cx="12191695" cy="6858000"/>
+          </a:xfrm>
+          <a:prstGeom prst="rect">
+            <a:avLst/>
+          </a:prstGeom>
+          <a:solidFill>
+            <a:srgbClr val="0D0C0F"/>
+          </a:solidFill>
+          <a:ln>
+            <a:noFill/>
+          </a:ln>
+          <a:effectLst/>
+        </p:spPr>
+        <p:style>
+          <a:lnRef idx="1">
+            <a:schemeClr val="accent1"/>
+          </a:lnRef>
+          <a:fillRef idx="3">
+            <a:schemeClr val="accent1"/>
+          </a:fillRef>
+          <a:effectRef idx="2">
+            <a:schemeClr val="accent1"/>
+          </a:effectRef>
+          <a:fontRef idx="minor">
+            <a:schemeClr val="lt1"/>
+          </a:fontRef>
+        </p:style>
+        <p:txBody>
+          <a:bodyPr rtlCol="0" anchor="ctr"/>
+          <a:lstStyle/>
+          <a:p/>
+        </p:txBody>
+      </p:sp>
+      <p:sp>
+        <p:nvSpPr>
+          <p:cNvPr id="3" name="TextBox 2"/>
+          <p:cNvSpPr txBox="1"/>
+          <p:nvPr/>
+        </p:nvSpPr>
+        <p:spPr>
+          <a:xfrm>
+            <a:off x="713232" y="475488"/>
+            <a:ext cx="10765231" cy="237744"/>
+          </a:xfrm>
+          <a:prstGeom prst="rect">
+            <a:avLst/>
+          </a:prstGeom>
+          <a:noFill/>
+        </p:spPr>
+        <p:txBody>
+          <a:bodyPr wrap="square" anchor="t" lIns="0" rIns="0" tIns="0" bIns="0">
+            <a:spAutoFit/>
+          </a:bodyPr>
+          <a:lstStyle/>
+          <a:p>
+            <a:pPr algn="l">
+              <a:lnSpc>
+                <a:spcPct val="135000"/>
+              </a:lnSpc>
+              <a:spcAft>
+                <a:spcPts val="0"/>
+              </a:spcAft>
+            </a:pPr>
+            <a:r>
+              <a:rPr sz="1200" b="1">
+                <a:solidFill>
+                  <a:srgbClr val="F73B20"/>
+                </a:solidFill>
+                <a:latin typeface="PingFang TC"/>
+                <a:ea typeface="PingFang TC"/>
+                <a:cs typeface="PingFang TC"/>
+              </a:rPr>
+              <a:t>下一步</a:t>
+            </a:r>
+          </a:p>
+        </p:txBody>
+      </p:sp>
+      <p:sp>
+        <p:nvSpPr>
+          <p:cNvPr id="4" name="TextBox 3"/>
+          <p:cNvSpPr txBox="1"/>
+          <p:nvPr/>
+        </p:nvSpPr>
+        <p:spPr>
+          <a:xfrm>
+            <a:off x="713232" y="768096"/>
+            <a:ext cx="10765231" cy="658368"/>
+          </a:xfrm>
+          <a:prstGeom prst="rect">
+            <a:avLst/>
+          </a:prstGeom>
+          <a:noFill/>
+        </p:spPr>
+        <p:txBody>
+          <a:bodyPr wrap="square" anchor="t" lIns="0" rIns="0" tIns="0" bIns="0">
+            <a:spAutoFit/>
+          </a:bodyPr>
+          <a:lstStyle/>
+          <a:p>
+            <a:pPr algn="l">
+              <a:lnSpc>
+                <a:spcPct val="112000"/>
+              </a:lnSpc>
+              <a:spcAft>
+                <a:spcPts val="0"/>
+              </a:spcAft>
+            </a:pPr>
+            <a:r>
+              <a:rPr sz="3200" b="1">
+                <a:solidFill>
+                  <a:srgbClr val="F4F1EE"/>
+                </a:solidFill>
+                <a:latin typeface="PingFang TC"/>
+                <a:ea typeface="PingFang TC"/>
+                <a:cs typeface="PingFang TC"/>
+              </a:rPr>
+              <a:t>想先開一個池試試看？</a:t>
+            </a:r>
+          </a:p>
+        </p:txBody>
+      </p:sp>
+      <p:sp>
+        <p:nvSpPr>
+          <p:cNvPr id="5" name="TextBox 4"/>
+          <p:cNvSpPr txBox="1"/>
+          <p:nvPr/>
+        </p:nvSpPr>
+        <p:spPr>
+          <a:xfrm>
+            <a:off x="713232" y="1408176"/>
+            <a:ext cx="10058400" cy="457200"/>
+          </a:xfrm>
+          <a:prstGeom prst="rect">
+            <a:avLst/>
+          </a:prstGeom>
+          <a:noFill/>
+        </p:spPr>
+        <p:txBody>
+          <a:bodyPr wrap="square" anchor="t" lIns="0" rIns="0" tIns="0" bIns="0">
+            <a:spAutoFit/>
+          </a:bodyPr>
+          <a:lstStyle/>
+          <a:p>
+            <a:pPr algn="l">
+              <a:lnSpc>
+                <a:spcPct val="135000"/>
+              </a:lnSpc>
+              <a:spcAft>
+                <a:spcPts val="0"/>
+              </a:spcAft>
+            </a:pPr>
+            <a:r>
+              <a:rPr sz="1500" b="0">
+                <a:solidFill>
+                  <a:srgbClr val="A49B96"/>
+                </a:solidFill>
+                <a:latin typeface="PingFang TC"/>
+                <a:ea typeface="PingFang TC"/>
+                <a:cs typeface="PingFang TC"/>
+              </a:rPr>
+              <a:t>第一個池上限 100 籤 / 100,000 點，沒有費用、不用保證金、不用審核排隊。</a:t>
+            </a:r>
+          </a:p>
+        </p:txBody>
+      </p:sp>
+      <p:sp>
+        <p:nvSpPr>
+          <p:cNvPr id="6" name="Rectangle 5"/>
+          <p:cNvSpPr/>
+          <p:nvPr/>
+        </p:nvSpPr>
+        <p:spPr>
+          <a:xfrm>
+            <a:off x="713232" y="6327648"/>
+            <a:ext cx="10765231" cy="12700"/>
+          </a:xfrm>
+          <a:prstGeom prst="rect">
+            <a:avLst/>
+          </a:prstGeom>
+          <a:solidFill>
+            <a:srgbClr val="222029"/>
+          </a:solidFill>
+          <a:ln>
+            <a:noFill/>
+          </a:ln>
+          <a:effectLst/>
+        </p:spPr>
+        <p:style>
+          <a:lnRef idx="1">
+            <a:schemeClr val="accent1"/>
+          </a:lnRef>
+          <a:fillRef idx="3">
+            <a:schemeClr val="accent1"/>
+          </a:fillRef>
+          <a:effectRef idx="2">
+            <a:schemeClr val="accent1"/>
+          </a:effectRef>
+          <a:fontRef idx="minor">
+            <a:schemeClr val="lt1"/>
+          </a:fontRef>
+        </p:style>
+        <p:txBody>
+          <a:bodyPr rtlCol="0" anchor="ctr"/>
+          <a:lstStyle/>
+          <a:p/>
+        </p:txBody>
+      </p:sp>
+      <p:sp>
+        <p:nvSpPr>
+          <p:cNvPr id="7" name="TextBox 6"/>
+          <p:cNvSpPr txBox="1"/>
+          <p:nvPr/>
+        </p:nvSpPr>
+        <p:spPr>
+          <a:xfrm>
+            <a:off x="713232" y="6428232"/>
+            <a:ext cx="5486400" cy="219456"/>
+          </a:xfrm>
+          <a:prstGeom prst="rect">
+            <a:avLst/>
+          </a:prstGeom>
+          <a:noFill/>
+        </p:spPr>
+        <p:txBody>
+          <a:bodyPr wrap="square" anchor="t" lIns="0" rIns="0" tIns="0" bIns="0">
+            <a:spAutoFit/>
+          </a:bodyPr>
+          <a:lstStyle/>
+          <a:p>
+            <a:pPr algn="l">
+              <a:lnSpc>
+                <a:spcPct val="135000"/>
+              </a:lnSpc>
+              <a:spcAft>
+                <a:spcPts val="0"/>
+              </a:spcAft>
+            </a:pPr>
+            <a:r>
+              <a:rPr sz="900" b="0">
+                <a:solidFill>
+                  <a:srgbClr val="6F6862"/>
+                </a:solidFill>
+                <a:latin typeface="PingFang TC"/>
+                <a:ea typeface="PingFang TC"/>
+                <a:cs typeface="PingFang TC"/>
+              </a:rPr>
+              <a:t>VaultDraw · 賣家合作說明</a:t>
+            </a:r>
+          </a:p>
+        </p:txBody>
+      </p:sp>
+      <p:sp>
+        <p:nvSpPr>
+          <p:cNvPr id="8" name="TextBox 7"/>
+          <p:cNvSpPr txBox="1"/>
+          <p:nvPr/>
+        </p:nvSpPr>
+        <p:spPr>
+          <a:xfrm>
+            <a:off x="10564063" y="6428232"/>
+            <a:ext cx="914400" cy="219456"/>
+          </a:xfrm>
+          <a:prstGeom prst="rect">
+            <a:avLst/>
+          </a:prstGeom>
+          <a:noFill/>
+        </p:spPr>
+        <p:txBody>
+          <a:bodyPr wrap="square" anchor="t" lIns="0" rIns="0" tIns="0" bIns="0">
+            <a:spAutoFit/>
+          </a:bodyPr>
+          <a:lstStyle/>
+          <a:p>
+            <a:pPr algn="r">
+              <a:lnSpc>
+                <a:spcPct val="135000"/>
+              </a:lnSpc>
+              <a:spcAft>
+                <a:spcPts val="0"/>
+              </a:spcAft>
+            </a:pPr>
+            <a:r>
+              <a:rPr sz="900" b="0">
+                <a:solidFill>
+                  <a:srgbClr val="6F6862"/>
+                </a:solidFill>
+                <a:latin typeface="PingFang TC"/>
+                <a:ea typeface="PingFang TC"/>
+                <a:cs typeface="PingFang TC"/>
+              </a:rPr>
+              <a:t>15</a:t>
             </a:r>
           </a:p>
         </p:txBody>

--- a/docs/deck/VaultDraw-賣家合作簡報.pptx
+++ b/docs/deck/VaultDraw-賣家合作簡報.pptx
@@ -8103,7 +8103,7 @@
                 <a:ea typeface="PingFang TC"/>
                 <a:cs typeface="PingFang TC"/>
               </a:rPr>
-              <a:t>靠內容與口碑，不靠買廣告</a:t>
+              <a:t>內容打底，廣告加速</a:t>
             </a:r>
           </a:p>
         </p:txBody>
@@ -8147,7 +8147,7 @@
                 <a:ea typeface="PingFang TC"/>
                 <a:cs typeface="PingFang TC"/>
               </a:rPr>
-              <a:t>付費廣告投不了 —— </a:t>
+              <a:t>廣告投得出去，變數在素材 —— </a:t>
             </a:r>
             <a:r>
               <a:rPr sz="1150" b="0">
@@ -8158,7 +8158,7 @@
                 <a:ea typeface="PingFang TC"/>
                 <a:cs typeface="PingFang TC"/>
               </a:rPr>
-              <a:t>Meta 把台灣列在博弈類廣告的不支援市場，Google 台灣只開放國營彩券。</a:t>
+              <a:t>擋的是「拿錢換錢」，我們的獎品是實體卡；素材講卡況，不講中獎金額。</a:t>
             </a:r>
           </a:p>
         </p:txBody>
@@ -8202,7 +8202,7 @@
                 <a:ea typeface="PingFang TC"/>
                 <a:cs typeface="PingFang TC"/>
               </a:rPr>
-              <a:t>我們發的內容是驗算 —— </a:t>
+              <a:t>台灣投放先過廣告主驗證 —— </a:t>
             </a:r>
             <a:r>
               <a:rPr sz="1150" b="0">
@@ -8213,7 +8213,7 @@
                 <a:ea typeface="PingFang TC"/>
                 <a:cs typeface="PingFang TC"/>
               </a:rPr>
-              <a:t>完抽後公開種子，「自己算一次」比「開到大獎」的截圖耐看。</a:t>
+              <a:t>2025 年 1 月起的法定要求，這關由平台跑完，你只要出素材。</a:t>
             </a:r>
           </a:p>
         </p:txBody>
@@ -8257,7 +8257,7 @@
                 <a:ea typeface="PingFang TC"/>
                 <a:cs typeface="PingFang TC"/>
               </a:rPr>
-              <a:t>開箱合作一律標示業配 —— </a:t>
+              <a:t>我們發的內容是驗算 —— </a:t>
             </a:r>
             <a:r>
               <a:rPr sz="1150" b="0">
@@ -8268,7 +8268,7 @@
                 <a:ea typeface="PingFang TC"/>
                 <a:cs typeface="PingFang TC"/>
               </a:rPr>
-              <a:t>沒揭露的推薦在台灣是公平交易法的射程。要嘛標清楚，要嘛不做。</a:t>
+              <a:t>完抽後公開種子，任何人都能自己算一次。這是別家抄不走的素材。</a:t>
             </a:r>
           </a:p>
         </p:txBody>
@@ -8444,7 +8444,7 @@
                 <a:ea typeface="PingFang TC"/>
                 <a:cs typeface="PingFang TC"/>
               </a:rPr>
-              <a:t>平台出版位與規則，不出現金</a:t>
+              <a:t>平台出版位與檔期</a:t>
             </a:r>
           </a:p>
         </p:txBody>
@@ -8598,7 +8598,7 @@
                 <a:ea typeface="PingFang TC"/>
                 <a:cs typeface="PingFang TC"/>
               </a:rPr>
-              <a:t>不會辦的 —— </a:t>
+              <a:t>開箱合作 —— </a:t>
             </a:r>
             <a:r>
               <a:rPr sz="1150" b="0">
@@ -8609,7 +8609,7 @@
                 <a:ea typeface="PingFang TC"/>
                 <a:cs typeface="PingFang TC"/>
               </a:rPr>
-              <a:t>抽中送現金、保證回本、平台加碼收購。點數不能提現、平台不能買回自己的獎品。</a:t>
+              <a:t>平台幫你牽線創作者。業配一律標示清楚（公平交易法），標了反而更有人信。</a:t>
             </a:r>
           </a:p>
         </p:txBody>
@@ -8939,7 +8939,7 @@
                 <a:ea typeface="PingFang TC"/>
                 <a:cs typeface="PingFang TC"/>
               </a:rPr>
-              <a:t>做不到的 —— </a:t>
+              <a:t>你的池只掛你的招牌 —— </a:t>
             </a:r>
             <a:r>
               <a:rPr sz="1150" b="0">
@@ -8950,7 +8950,7 @@
                 <a:ea typeface="PingFang TC"/>
                 <a:cs typeface="PingFang TC"/>
               </a:rPr>
-              <a:t>平台不代管卡，寄賣沒有；一個池只屬於一個賣家，聯名池目前也沒有。</a:t>
+              <a:t>一個池屬於一個賣家，客人在你的池頁面不會看到別人的名字。</a:t>
             </a:r>
           </a:p>
         </p:txBody>
@@ -8994,7 +8994,7 @@
                 <a:ea typeface="PingFang TC"/>
                 <a:cs typeface="PingFang TC"/>
               </a:rPr>
-              <a:t>廣告政策查證（政策原文）：Meta「Online Gambling and Games」的不支援市場清單列有台灣；Google Ads 台灣 gambling 僅開放國營／國家主辦彩券，且經營者須為國家核准實體。</a:t>
+              <a:t>政策查證（2026-09）：Meta 以「投注與獎項含金錢價值」界定博弈，實體商品的抽選包不在明文範圍 —— 是送審歸類問題，不是禁止。台灣投放另需廣告主驗證（2025-01 起）。</a:t>
             </a:r>
           </a:p>
         </p:txBody>
